--- a/presentations/18_tte_validation.pptx
+++ b/presentations/18_tte_validation.pptx
@@ -1764,7 +1764,7 @@
             <a:r>
               <a:rPr lang="en-US" sz="1200" i="1" dirty="0">
                 <a:solidFill>
-                  <a:srgbClr val="5A7682"/>
+                  <a:srgbClr val="8FAEB8"/>
                 </a:solidFill>
                 <a:latin typeface="Calibri" pitchFamily="34" charset="0"/>
                 <a:ea typeface="Calibri" pitchFamily="34" charset="-122"/>
@@ -4484,7 +4484,7 @@
                 <a:ea typeface="Calibri" pitchFamily="34" charset="-122"/>
                 <a:cs typeface="Calibri" pitchFamily="34" charset="-120"/>
               </a:rPr>
-              <a:t>With CNSDTDSC a reviewer can count them separately and judge whether the independent-censoring assumption is credible. That is a question about the VALIDITY OF THE ANALYSIS, not a detail of bookkeeping — which is why the standard requires the variable.</a:t>
+              <a:t>With CNSDTDSC a reviewer can count them separately and judge whether the independent-censoring assumption is credible. That is a question about the VALIDITY OF THE ANALYSIS, not a detail of bookkeeping — which is why studies that censor for more than one reason should carry it. ADaM permits the variable rather than requiring it; recording the reason is a design choice you make, and defend, in the define.</a:t>
             </a:r>
             <a:endParaRPr lang="en-US" sz="1350" dirty="0"/>
           </a:p>
